--- a/关卡设计文档 .pptx
+++ b/关卡设计文档 .pptx
@@ -3159,6 +3159,31 @@
                 <a:spcPct val="160000"/>
               </a:lnSpc>
             </a:pPr>
+            <a:r>
+              <a:rPr lang="zh-CN" altLang="en-US" sz="1275" b="1" dirty="0">
+                <a:latin typeface="Microsoft YaHei"/>
+                <a:ea typeface="Microsoft YaHei"/>
+              </a:rPr>
+              <a:t>支线：</a:t>
+            </a:r>
+            <a:r>
+              <a:rPr lang="zh-CN" altLang="en-US" sz="1275" dirty="0">
+                <a:latin typeface="Microsoft YaHei"/>
+                <a:ea typeface="Microsoft YaHei"/>
+              </a:rPr>
+              <a:t>探索教堂中各个区域，包括双门前瞭望塔，地下墓地等</a:t>
+            </a:r>
+            <a:endParaRPr lang="en-US" altLang="zh-CN" sz="1275" dirty="0">
+              <a:latin typeface="Microsoft YaHei"/>
+              <a:ea typeface="Microsoft YaHei"/>
+            </a:endParaRPr>
+          </a:p>
+          <a:p>
+            <a:pPr>
+              <a:lnSpc>
+                <a:spcPct val="160000"/>
+              </a:lnSpc>
+            </a:pPr>
             <a:endParaRPr lang="zh-CN" altLang="en-US" dirty="0"/>
           </a:p>
         </p:txBody>
